--- a/Project Submission Template for EduentFoundation_IBMUniversityEngagement (1).pptx
+++ b/Project Submission Template for EduentFoundation_IBMUniversityEngagement (1).pptx
@@ -12231,7 +12231,7 @@
         </p:nvSpPr>
         <p:spPr>
           <a:xfrm>
-            <a:off x="1218724" y="1153712"/>
+            <a:off x="913924" y="1221715"/>
             <a:ext cx="9214580" cy="4277001"/>
           </a:xfrm>
           <a:prstGeom prst="rect">
@@ -12266,74 +12266,7 @@
               <a:buNone/>
             </a:pPr>
             <a:r>
-              <a:rPr lang="en-US" sz="1850" b="0" i="0" u="none" strike="noStrike" cap="none" dirty="0">
-                <a:solidFill>
-                  <a:srgbClr val="2B3541"/>
-                </a:solidFill>
-                <a:latin typeface="Times New Roman"/>
-                <a:ea typeface="Times New Roman"/>
-                <a:cs typeface="Times New Roman"/>
-                <a:sym typeface="Times New Roman"/>
-              </a:rPr>
-              <a:t>· Please create public </a:t>
-            </a:r>
-            <a:r>
-              <a:rPr lang="en-US" sz="1850" b="0" i="0" u="none" strike="noStrike" cap="none" dirty="0" err="1">
-                <a:solidFill>
-                  <a:srgbClr val="2B3541"/>
-                </a:solidFill>
-                <a:latin typeface="Times New Roman"/>
-                <a:ea typeface="Times New Roman"/>
-                <a:cs typeface="Times New Roman"/>
-                <a:sym typeface="Times New Roman"/>
-              </a:rPr>
-              <a:t>github</a:t>
-            </a:r>
-            <a:r>
-              <a:rPr lang="en-US" sz="1850" b="0" i="0" u="none" strike="noStrike" cap="none" dirty="0">
-                <a:solidFill>
-                  <a:srgbClr val="2B3541"/>
-                </a:solidFill>
-                <a:latin typeface="Times New Roman"/>
-                <a:ea typeface="Times New Roman"/>
-                <a:cs typeface="Times New Roman"/>
-                <a:sym typeface="Times New Roman"/>
-              </a:rPr>
-              <a:t> repository (Enable Add README  button while creating repository) with format – </a:t>
-            </a:r>
-          </a:p>
-          <a:p>
-            <a:pPr marL="0" marR="0" lvl="0" indent="0" algn="l" rtl="0">
-              <a:lnSpc>
-                <a:spcPct val="162162"/>
-              </a:lnSpc>
-              <a:spcBef>
-                <a:spcPts val="0"/>
-              </a:spcBef>
-              <a:spcAft>
-                <a:spcPts val="0"/>
-              </a:spcAft>
-              <a:buClr>
-                <a:srgbClr val="2B3541"/>
-              </a:buClr>
-              <a:buSzPts val="1850"/>
-              <a:buFont typeface="Times New Roman"/>
-              <a:buNone/>
-            </a:pPr>
-            <a:r>
-              <a:rPr lang="en-US" sz="1850" dirty="0">
-                <a:solidFill>
-                  <a:srgbClr val="2B3541"/>
-                </a:solidFill>
-                <a:latin typeface="Times New Roman"/>
-                <a:ea typeface="Times New Roman"/>
-                <a:cs typeface="Times New Roman"/>
-                <a:sym typeface="Times New Roman"/>
-              </a:rPr>
-              <a:t>Please test and Paste the working  </a:t>
-            </a:r>
-            <a:r>
-              <a:rPr lang="en-US" sz="1850" dirty="0" err="1">
+              <a:rPr lang="en-US" sz="1850">
                 <a:solidFill>
                   <a:srgbClr val="2B3541"/>
                 </a:solidFill>
@@ -12354,101 +12287,7 @@
                 <a:cs typeface="Times New Roman"/>
                 <a:sym typeface="Times New Roman"/>
               </a:rPr>
-              <a:t> URL –</a:t>
-            </a:r>
-          </a:p>
-          <a:p>
-            <a:pPr lvl="0">
-              <a:lnSpc>
-                <a:spcPct val="162162"/>
-              </a:lnSpc>
-              <a:buClr>
-                <a:srgbClr val="2B3541"/>
-              </a:buClr>
-              <a:buSzPts val="1850"/>
-            </a:pPr>
-            <a:r>
-              <a:rPr lang="en-US" sz="1850" b="1" dirty="0">
-                <a:solidFill>
-                  <a:srgbClr val="2B3541"/>
-                </a:solidFill>
-                <a:latin typeface="Times New Roman"/>
-                <a:ea typeface="Times New Roman"/>
-                <a:cs typeface="Times New Roman"/>
-                <a:sym typeface="Times New Roman"/>
-              </a:rPr>
-              <a:t>Make sure you have Uploaded following three files into your </a:t>
-            </a:r>
-            <a:r>
-              <a:rPr lang="en-US" sz="1850" b="1" dirty="0" err="1">
-                <a:solidFill>
-                  <a:srgbClr val="2B3541"/>
-                </a:solidFill>
-                <a:latin typeface="Times New Roman"/>
-                <a:ea typeface="Times New Roman"/>
-                <a:cs typeface="Times New Roman"/>
-                <a:sym typeface="Times New Roman"/>
-              </a:rPr>
-              <a:t>github</a:t>
-            </a:r>
-            <a:r>
-              <a:rPr lang="en-US" sz="1850" b="1" dirty="0">
-                <a:solidFill>
-                  <a:srgbClr val="2B3541"/>
-                </a:solidFill>
-                <a:latin typeface="Times New Roman"/>
-                <a:ea typeface="Times New Roman"/>
-                <a:cs typeface="Times New Roman"/>
-                <a:sym typeface="Times New Roman"/>
-              </a:rPr>
-              <a:t> repository  </a:t>
-            </a:r>
-            <a:br>
-              <a:rPr lang="en-US" sz="1850" dirty="0">
-                <a:solidFill>
-                  <a:srgbClr val="2B3541"/>
-                </a:solidFill>
-                <a:latin typeface="Times New Roman"/>
-                <a:ea typeface="Times New Roman"/>
-                <a:cs typeface="Times New Roman"/>
-                <a:sym typeface="Times New Roman"/>
-              </a:rPr>
-            </a:br>
-            <a:r>
-              <a:rPr lang="en-US" sz="1850" dirty="0">
-                <a:solidFill>
-                  <a:srgbClr val="2B3541"/>
-                </a:solidFill>
-                <a:latin typeface="Times New Roman"/>
-                <a:ea typeface="Times New Roman"/>
-                <a:cs typeface="Times New Roman"/>
-                <a:sym typeface="Times New Roman"/>
-              </a:rPr>
-              <a:t>1) </a:t>
-            </a:r>
-            <a:r>
-              <a:rPr lang="en-US" sz="1850" dirty="0" err="1">
-                <a:solidFill>
-                  <a:srgbClr val="2B3541"/>
-                </a:solidFill>
-                <a:latin typeface="Times New Roman"/>
-                <a:ea typeface="Times New Roman"/>
-                <a:cs typeface="Times New Roman"/>
-                <a:sym typeface="Times New Roman"/>
-              </a:rPr>
-              <a:t>app.json</a:t>
-            </a:r>
-            <a:r>
-              <a:rPr lang="en-US" sz="1850" dirty="0">
-                <a:solidFill>
-                  <a:srgbClr val="2B3541"/>
-                </a:solidFill>
-                <a:latin typeface="Times New Roman"/>
-                <a:ea typeface="Times New Roman"/>
-                <a:cs typeface="Times New Roman"/>
-                <a:sym typeface="Times New Roman"/>
-              </a:rPr>
-              <a:t> file , 2) yourproblemstatement.pdf file  3) your projectpresntation.pptx file 4)any other files </a:t>
+              <a:t> URL –https://github.com/Keerthana-narayan12/Mind-health.git</a:t>
             </a:r>
           </a:p>
           <a:p>
